--- a/presentations/Automated Presentations/ISAAI-Runs-Summary-Deck.pptx
+++ b/presentations/Automated Presentations/ISAAI-Runs-Summary-Deck.pptx
@@ -10,6 +10,7 @@
     <p:sldId id="258" r:id="rId9"/>
     <p:sldId id="259" r:id="rId10"/>
     <p:sldId id="260" r:id="rId11"/>
+    <p:sldId id="261" r:id="rId12"/>
   </p:sldIdLst>
   <p:sldSz cx="9144000" cy="6858000" type="screen4x3"/>
   <p:notesSz cx="6858000" cy="9144000"/>
@@ -3129,12 +3130,12 @@
           <a:lstStyle/>
           <a:p>
             <a:r>
-              <a:t>Automated summary of 15 simulated daily validation runs</a:t>
-            </a:r>
-          </a:p>
-          <a:p>
-            <a:r>
-              <a:t>Generated on 2026-06-25 13:52:20</a:t>
+              <a:t>Automated summary of 30 simulated daily validation runs</a:t>
+            </a:r>
+          </a:p>
+          <a:p>
+            <a:r>
+              <a:t>Generated on 2026-06-28 23:19:03</a:t>
             </a:r>
           </a:p>
         </p:txBody>
@@ -3208,7 +3209,7 @@
               </a:defRPr>
             </a:pPr>
             <a:r>
-              <a:t>Total Inbound Runs Analyzed: 15</a:t>
+              <a:t>Total Inbound Runs Analyzed: 30</a:t>
             </a:r>
           </a:p>
           <a:p>
@@ -3220,7 +3221,7 @@
               </a:defRPr>
             </a:pPr>
             <a:r>
-              <a:t>• Happy Path (No violations detected): 10 (66.7%)</a:t>
+              <a:t>• Happy Path (No violations detected): 20 (66.7%)</a:t>
             </a:r>
           </a:p>
           <a:p>
@@ -3232,7 +3233,7 @@
               </a:defRPr>
             </a:pPr>
             <a:r>
-              <a:t>• Warning (Violation marker present, thresholds pass): 3 (20.0%)</a:t>
+              <a:t>• Warning (Violation marker present, thresholds pass): 7 (23.3%)</a:t>
             </a:r>
           </a:p>
           <a:p>
@@ -3244,7 +3245,7 @@
               </a:defRPr>
             </a:pPr>
             <a:r>
-              <a:t>• Escalate / Exception (Violation marker present, threshold breached): 2 (13.3%)</a:t>
+              <a:t>• Escalate / Exception (Violation marker present, threshold breached): 3 (10.0%)</a:t>
             </a:r>
           </a:p>
         </p:txBody>
@@ -3454,7 +3455,7 @@
                         <a:defRPr sz="1200"/>
                       </a:pPr>
                       <a:r>
-                        <a:t>Run 14</a:t>
+                        <a:t>Run 28</a:t>
                       </a:r>
                     </a:p>
                   </a:txBody>
@@ -3469,7 +3470,7 @@
                         <a:defRPr sz="1200"/>
                       </a:pPr>
                       <a:r>
-                        <a:t>20260623</a:t>
+                        <a:t>20260625</a:t>
                       </a:r>
                     </a:p>
                   </a:txBody>
@@ -3543,7 +3544,7 @@
                         <a:defRPr sz="1200"/>
                       </a:pPr>
                       <a:r>
-                        <a:t>Run 15</a:t>
+                        <a:t>Run 29</a:t>
                       </a:r>
                     </a:p>
                   </a:txBody>
@@ -3558,7 +3559,7 @@
                         <a:defRPr sz="1200"/>
                       </a:pPr>
                       <a:r>
-                        <a:t>20260624</a:t>
+                        <a:t>20260626</a:t>
                       </a:r>
                     </a:p>
                   </a:txBody>
@@ -3632,7 +3633,7 @@
                         <a:defRPr sz="1200"/>
                       </a:pPr>
                       <a:r>
-                        <a:t>Run 2</a:t>
+                        <a:t>Run 3</a:t>
                       </a:r>
                     </a:p>
                   </a:txBody>
@@ -3647,7 +3648,7 @@
                         <a:defRPr sz="1200"/>
                       </a:pPr>
                       <a:r>
-                        <a:t>20260611</a:t>
+                        <a:t>20260531</a:t>
                       </a:r>
                     </a:p>
                   </a:txBody>
@@ -3680,12 +3681,330 @@
                       <a:pPr algn="ctr">
                         <a:defRPr sz="1200">
                           <a:solidFill>
-                            <a:srgbClr val="00508F"/>
+                            <a:srgbClr val="2E7D32"/>
                           </a:solidFill>
                         </a:defRPr>
                       </a:pPr>
                       <a:r>
-                        <a:t>NoEscalation</a:t>
+                        <a:t>Happy</a:t>
+                      </a:r>
+                    </a:p>
+                  </a:txBody>
+                  <a:tcPr/>
+                </a:tc>
+                <a:tc>
+                  <a:txBody>
+                    <a:bodyPr/>
+                    <a:lstStyle/>
+                    <a:p>
+                      <a:pPr algn="ctr">
+                        <a:defRPr sz="1200">
+                          <a:solidFill>
+                            <a:srgbClr val="2E7D32"/>
+                          </a:solidFill>
+                        </a:defRPr>
+                      </a:pPr>
+                      <a:r>
+                        <a:t>Happy</a:t>
+                      </a:r>
+                    </a:p>
+                  </a:txBody>
+                  <a:tcPr/>
+                </a:tc>
+              </a:tr>
+              <a:tr h="374072">
+                <a:tc>
+                  <a:txBody>
+                    <a:bodyPr/>
+                    <a:lstStyle/>
+                    <a:p>
+                      <a:pPr algn="ctr">
+                        <a:defRPr sz="1200"/>
+                      </a:pPr>
+                      <a:r>
+                        <a:t>Run 30</a:t>
+                      </a:r>
+                    </a:p>
+                  </a:txBody>
+                  <a:tcPr/>
+                </a:tc>
+                <a:tc>
+                  <a:txBody>
+                    <a:bodyPr/>
+                    <a:lstStyle/>
+                    <a:p>
+                      <a:pPr algn="ctr">
+                        <a:defRPr sz="1200"/>
+                      </a:pPr>
+                      <a:r>
+                        <a:t>20260627</a:t>
+                      </a:r>
+                    </a:p>
+                  </a:txBody>
+                  <a:tcPr/>
+                </a:tc>
+                <a:tc>
+                  <a:txBody>
+                    <a:bodyPr/>
+                    <a:lstStyle/>
+                    <a:p>
+                      <a:pPr algn="ctr">
+                        <a:defRPr sz="1200">
+                          <a:solidFill>
+                            <a:srgbClr val="2E7D32"/>
+                          </a:solidFill>
+                        </a:defRPr>
+                      </a:pPr>
+                      <a:r>
+                        <a:t>Happy</a:t>
+                      </a:r>
+                    </a:p>
+                  </a:txBody>
+                  <a:tcPr/>
+                </a:tc>
+                <a:tc>
+                  <a:txBody>
+                    <a:bodyPr/>
+                    <a:lstStyle/>
+                    <a:p>
+                      <a:pPr algn="ctr">
+                        <a:defRPr sz="1200">
+                          <a:solidFill>
+                            <a:srgbClr val="2E7D32"/>
+                          </a:solidFill>
+                        </a:defRPr>
+                      </a:pPr>
+                      <a:r>
+                        <a:t>Happy</a:t>
+                      </a:r>
+                    </a:p>
+                  </a:txBody>
+                  <a:tcPr/>
+                </a:tc>
+                <a:tc>
+                  <a:txBody>
+                    <a:bodyPr/>
+                    <a:lstStyle/>
+                    <a:p>
+                      <a:pPr algn="ctr">
+                        <a:defRPr sz="1200">
+                          <a:solidFill>
+                            <a:srgbClr val="2E7D32"/>
+                          </a:solidFill>
+                        </a:defRPr>
+                      </a:pPr>
+                      <a:r>
+                        <a:t>Happy</a:t>
+                      </a:r>
+                    </a:p>
+                  </a:txBody>
+                  <a:tcPr/>
+                </a:tc>
+              </a:tr>
+              <a:tr h="374072">
+                <a:tc>
+                  <a:txBody>
+                    <a:bodyPr/>
+                    <a:lstStyle/>
+                    <a:p>
+                      <a:pPr algn="ctr">
+                        <a:defRPr sz="1200"/>
+                      </a:pPr>
+                      <a:r>
+                        <a:t>Run 4</a:t>
+                      </a:r>
+                    </a:p>
+                  </a:txBody>
+                  <a:tcPr/>
+                </a:tc>
+                <a:tc>
+                  <a:txBody>
+                    <a:bodyPr/>
+                    <a:lstStyle/>
+                    <a:p>
+                      <a:pPr algn="ctr">
+                        <a:defRPr sz="1200"/>
+                      </a:pPr>
+                      <a:r>
+                        <a:t>20260601</a:t>
+                      </a:r>
+                    </a:p>
+                  </a:txBody>
+                  <a:tcPr/>
+                </a:tc>
+                <a:tc>
+                  <a:txBody>
+                    <a:bodyPr/>
+                    <a:lstStyle/>
+                    <a:p>
+                      <a:pPr algn="ctr">
+                        <a:defRPr sz="1200">
+                          <a:solidFill>
+                            <a:srgbClr val="2E7D32"/>
+                          </a:solidFill>
+                        </a:defRPr>
+                      </a:pPr>
+                      <a:r>
+                        <a:t>Happy</a:t>
+                      </a:r>
+                    </a:p>
+                  </a:txBody>
+                  <a:tcPr/>
+                </a:tc>
+                <a:tc>
+                  <a:txBody>
+                    <a:bodyPr/>
+                    <a:lstStyle/>
+                    <a:p>
+                      <a:pPr algn="ctr">
+                        <a:defRPr sz="1200" b="1">
+                          <a:solidFill>
+                            <a:srgbClr val="D9383A"/>
+                          </a:solidFill>
+                        </a:defRPr>
+                      </a:pPr>
+                      <a:r>
+                        <a:t>Exception</a:t>
+                      </a:r>
+                    </a:p>
+                  </a:txBody>
+                  <a:tcPr/>
+                </a:tc>
+                <a:tc>
+                  <a:txBody>
+                    <a:bodyPr/>
+                    <a:lstStyle/>
+                    <a:p>
+                      <a:pPr algn="ctr">
+                        <a:defRPr sz="1200" b="1">
+                          <a:solidFill>
+                            <a:srgbClr val="D9383A"/>
+                          </a:solidFill>
+                        </a:defRPr>
+                      </a:pPr>
+                      <a:r>
+                        <a:t>Exception</a:t>
+                      </a:r>
+                    </a:p>
+                  </a:txBody>
+                  <a:tcPr/>
+                </a:tc>
+              </a:tr>
+              <a:tr h="374072">
+                <a:tc>
+                  <a:txBody>
+                    <a:bodyPr/>
+                    <a:lstStyle/>
+                    <a:p>
+                      <a:pPr algn="ctr">
+                        <a:defRPr sz="1200"/>
+                      </a:pPr>
+                      <a:r>
+                        <a:t>Run 5</a:t>
+                      </a:r>
+                    </a:p>
+                  </a:txBody>
+                  <a:tcPr/>
+                </a:tc>
+                <a:tc>
+                  <a:txBody>
+                    <a:bodyPr/>
+                    <a:lstStyle/>
+                    <a:p>
+                      <a:pPr algn="ctr">
+                        <a:defRPr sz="1200"/>
+                      </a:pPr>
+                      <a:r>
+                        <a:t>20260602</a:t>
+                      </a:r>
+                    </a:p>
+                  </a:txBody>
+                  <a:tcPr/>
+                </a:tc>
+                <a:tc>
+                  <a:txBody>
+                    <a:bodyPr/>
+                    <a:lstStyle/>
+                    <a:p>
+                      <a:pPr algn="ctr">
+                        <a:defRPr sz="1200">
+                          <a:solidFill>
+                            <a:srgbClr val="2E7D32"/>
+                          </a:solidFill>
+                        </a:defRPr>
+                      </a:pPr>
+                      <a:r>
+                        <a:t>Happy</a:t>
+                      </a:r>
+                    </a:p>
+                  </a:txBody>
+                  <a:tcPr/>
+                </a:tc>
+                <a:tc>
+                  <a:txBody>
+                    <a:bodyPr/>
+                    <a:lstStyle/>
+                    <a:p>
+                      <a:pPr algn="ctr">
+                        <a:defRPr sz="1200">
+                          <a:solidFill>
+                            <a:srgbClr val="2E7D32"/>
+                          </a:solidFill>
+                        </a:defRPr>
+                      </a:pPr>
+                      <a:r>
+                        <a:t>Happy</a:t>
+                      </a:r>
+                    </a:p>
+                  </a:txBody>
+                  <a:tcPr/>
+                </a:tc>
+                <a:tc>
+                  <a:txBody>
+                    <a:bodyPr/>
+                    <a:lstStyle/>
+                    <a:p>
+                      <a:pPr algn="ctr">
+                        <a:defRPr sz="1200">
+                          <a:solidFill>
+                            <a:srgbClr val="2E7D32"/>
+                          </a:solidFill>
+                        </a:defRPr>
+                      </a:pPr>
+                      <a:r>
+                        <a:t>Happy</a:t>
+                      </a:r>
+                    </a:p>
+                  </a:txBody>
+                  <a:tcPr/>
+                </a:tc>
+              </a:tr>
+              <a:tr h="374072">
+                <a:tc>
+                  <a:txBody>
+                    <a:bodyPr/>
+                    <a:lstStyle/>
+                    <a:p>
+                      <a:pPr algn="ctr">
+                        <a:defRPr sz="1200"/>
+                      </a:pPr>
+                      <a:r>
+                        <a:t>Run 6</a:t>
+                      </a:r>
+                    </a:p>
+                  </a:txBody>
+                  <a:tcPr/>
+                </a:tc>
+                <a:tc>
+                  <a:txBody>
+                    <a:bodyPr/>
+                    <a:lstStyle/>
+                    <a:p>
+                      <a:pPr algn="ctr">
+                        <a:defRPr sz="1200"/>
+                      </a:pPr>
+                      <a:r>
+                        <a:t>20260603</a:t>
                       </a:r>
                     </a:p>
                   </a:txBody>
@@ -3710,38 +4029,6 @@
                   </a:txBody>
                   <a:tcPr/>
                 </a:tc>
-              </a:tr>
-              <a:tr h="374072">
-                <a:tc>
-                  <a:txBody>
-                    <a:bodyPr/>
-                    <a:lstStyle/>
-                    <a:p>
-                      <a:pPr algn="ctr">
-                        <a:defRPr sz="1200"/>
-                      </a:pPr>
-                      <a:r>
-                        <a:t>Run 3</a:t>
-                      </a:r>
-                    </a:p>
-                  </a:txBody>
-                  <a:tcPr/>
-                </a:tc>
-                <a:tc>
-                  <a:txBody>
-                    <a:bodyPr/>
-                    <a:lstStyle/>
-                    <a:p>
-                      <a:pPr algn="ctr">
-                        <a:defRPr sz="1200"/>
-                      </a:pPr>
-                      <a:r>
-                        <a:t>20260612</a:t>
-                      </a:r>
-                    </a:p>
-                  </a:txBody>
-                  <a:tcPr/>
-                </a:tc>
                 <a:tc>
                   <a:txBody>
                     <a:bodyPr/>
@@ -3769,12 +4056,44 @@
                       <a:pPr algn="ctr">
                         <a:defRPr sz="1200">
                           <a:solidFill>
-                            <a:srgbClr val="2E7D32"/>
+                            <a:srgbClr val="00508F"/>
                           </a:solidFill>
                         </a:defRPr>
                       </a:pPr>
                       <a:r>
-                        <a:t>Happy</a:t>
+                        <a:t>NoEscalation</a:t>
+                      </a:r>
+                    </a:p>
+                  </a:txBody>
+                  <a:tcPr/>
+                </a:tc>
+              </a:tr>
+              <a:tr h="374072">
+                <a:tc>
+                  <a:txBody>
+                    <a:bodyPr/>
+                    <a:lstStyle/>
+                    <a:p>
+                      <a:pPr algn="ctr">
+                        <a:defRPr sz="1200"/>
+                      </a:pPr>
+                      <a:r>
+                        <a:t>Run 7</a:t>
+                      </a:r>
+                    </a:p>
+                  </a:txBody>
+                  <a:tcPr/>
+                </a:tc>
+                <a:tc>
+                  <a:txBody>
+                    <a:bodyPr/>
+                    <a:lstStyle/>
+                    <a:p>
+                      <a:pPr algn="ctr">
+                        <a:defRPr sz="1200"/>
+                      </a:pPr>
+                      <a:r>
+                        <a:t>20260604</a:t>
                       </a:r>
                     </a:p>
                   </a:txBody>
@@ -3799,38 +4118,6 @@
                   </a:txBody>
                   <a:tcPr/>
                 </a:tc>
-              </a:tr>
-              <a:tr h="374072">
-                <a:tc>
-                  <a:txBody>
-                    <a:bodyPr/>
-                    <a:lstStyle/>
-                    <a:p>
-                      <a:pPr algn="ctr">
-                        <a:defRPr sz="1200"/>
-                      </a:pPr>
-                      <a:r>
-                        <a:t>Run 4</a:t>
-                      </a:r>
-                    </a:p>
-                  </a:txBody>
-                  <a:tcPr/>
-                </a:tc>
-                <a:tc>
-                  <a:txBody>
-                    <a:bodyPr/>
-                    <a:lstStyle/>
-                    <a:p>
-                      <a:pPr algn="ctr">
-                        <a:defRPr sz="1200"/>
-                      </a:pPr>
-                      <a:r>
-                        <a:t>20260613</a:t>
-                      </a:r>
-                    </a:p>
-                  </a:txBody>
-                  <a:tcPr/>
-                </a:tc>
                 <a:tc>
                   <a:txBody>
                     <a:bodyPr/>
@@ -3869,6 +4156,38 @@
                   </a:txBody>
                   <a:tcPr/>
                 </a:tc>
+              </a:tr>
+              <a:tr h="374072">
+                <a:tc>
+                  <a:txBody>
+                    <a:bodyPr/>
+                    <a:lstStyle/>
+                    <a:p>
+                      <a:pPr algn="ctr">
+                        <a:defRPr sz="1200"/>
+                      </a:pPr>
+                      <a:r>
+                        <a:t>Run 8</a:t>
+                      </a:r>
+                    </a:p>
+                  </a:txBody>
+                  <a:tcPr/>
+                </a:tc>
+                <a:tc>
+                  <a:txBody>
+                    <a:bodyPr/>
+                    <a:lstStyle/>
+                    <a:p>
+                      <a:pPr algn="ctr">
+                        <a:defRPr sz="1200"/>
+                      </a:pPr>
+                      <a:r>
+                        <a:t>20260605</a:t>
+                      </a:r>
+                    </a:p>
+                  </a:txBody>
+                  <a:tcPr/>
+                </a:tc>
                 <a:tc>
                   <a:txBody>
                     <a:bodyPr/>
@@ -3888,38 +4207,6 @@
                   </a:txBody>
                   <a:tcPr/>
                 </a:tc>
-              </a:tr>
-              <a:tr h="374072">
-                <a:tc>
-                  <a:txBody>
-                    <a:bodyPr/>
-                    <a:lstStyle/>
-                    <a:p>
-                      <a:pPr algn="ctr">
-                        <a:defRPr sz="1200"/>
-                      </a:pPr>
-                      <a:r>
-                        <a:t>Run 5</a:t>
-                      </a:r>
-                    </a:p>
-                  </a:txBody>
-                  <a:tcPr/>
-                </a:tc>
-                <a:tc>
-                  <a:txBody>
-                    <a:bodyPr/>
-                    <a:lstStyle/>
-                    <a:p>
-                      <a:pPr algn="ctr">
-                        <a:defRPr sz="1200"/>
-                      </a:pPr>
-                      <a:r>
-                        <a:t>20260614</a:t>
-                      </a:r>
-                    </a:p>
-                  </a:txBody>
-                  <a:tcPr/>
-                </a:tc>
                 <a:tc>
                   <a:txBody>
                     <a:bodyPr/>
@@ -3945,95 +4232,6 @@
                     <a:lstStyle/>
                     <a:p>
                       <a:pPr algn="ctr">
-                        <a:defRPr sz="1200" b="1">
-                          <a:solidFill>
-                            <a:srgbClr val="D9383A"/>
-                          </a:solidFill>
-                        </a:defRPr>
-                      </a:pPr>
-                      <a:r>
-                        <a:t>Exception</a:t>
-                      </a:r>
-                    </a:p>
-                  </a:txBody>
-                  <a:tcPr/>
-                </a:tc>
-                <a:tc>
-                  <a:txBody>
-                    <a:bodyPr/>
-                    <a:lstStyle/>
-                    <a:p>
-                      <a:pPr algn="ctr">
-                        <a:defRPr sz="1200" b="1">
-                          <a:solidFill>
-                            <a:srgbClr val="D9383A"/>
-                          </a:solidFill>
-                        </a:defRPr>
-                      </a:pPr>
-                      <a:r>
-                        <a:t>Exception</a:t>
-                      </a:r>
-                    </a:p>
-                  </a:txBody>
-                  <a:tcPr/>
-                </a:tc>
-              </a:tr>
-              <a:tr h="374072">
-                <a:tc>
-                  <a:txBody>
-                    <a:bodyPr/>
-                    <a:lstStyle/>
-                    <a:p>
-                      <a:pPr algn="ctr">
-                        <a:defRPr sz="1200"/>
-                      </a:pPr>
-                      <a:r>
-                        <a:t>Run 6</a:t>
-                      </a:r>
-                    </a:p>
-                  </a:txBody>
-                  <a:tcPr/>
-                </a:tc>
-                <a:tc>
-                  <a:txBody>
-                    <a:bodyPr/>
-                    <a:lstStyle/>
-                    <a:p>
-                      <a:pPr algn="ctr">
-                        <a:defRPr sz="1200"/>
-                      </a:pPr>
-                      <a:r>
-                        <a:t>20260615</a:t>
-                      </a:r>
-                    </a:p>
-                  </a:txBody>
-                  <a:tcPr/>
-                </a:tc>
-                <a:tc>
-                  <a:txBody>
-                    <a:bodyPr/>
-                    <a:lstStyle/>
-                    <a:p>
-                      <a:pPr algn="ctr">
-                        <a:defRPr sz="1200">
-                          <a:solidFill>
-                            <a:srgbClr val="00508F"/>
-                          </a:solidFill>
-                        </a:defRPr>
-                      </a:pPr>
-                      <a:r>
-                        <a:t>NoEscalation</a:t>
-                      </a:r>
-                    </a:p>
-                  </a:txBody>
-                  <a:tcPr/>
-                </a:tc>
-                <a:tc>
-                  <a:txBody>
-                    <a:bodyPr/>
-                    <a:lstStyle/>
-                    <a:p>
-                      <a:pPr algn="ctr">
                         <a:defRPr sz="1200">
                           <a:solidFill>
                             <a:srgbClr val="2E7D32"/>
@@ -4047,27 +4245,23 @@
                   </a:txBody>
                   <a:tcPr/>
                 </a:tc>
-                <a:tc>
-                  <a:txBody>
-                    <a:bodyPr/>
-                    <a:lstStyle/>
-                    <a:p>
-                      <a:pPr algn="ctr">
-                        <a:defRPr sz="1200">
-                          <a:solidFill>
-                            <a:srgbClr val="00508F"/>
-                          </a:solidFill>
-                        </a:defRPr>
-                      </a:pPr>
-                      <a:r>
-                        <a:t>NoEscalation</a:t>
+              </a:tr>
+              <a:tr h="374080">
+                <a:tc>
+                  <a:txBody>
+                    <a:bodyPr/>
+                    <a:lstStyle/>
+                    <a:p>
+                      <a:pPr algn="ctr">
+                        <a:defRPr sz="1200"/>
+                      </a:pPr>
+                      <a:r>
+                        <a:t>Run 9</a:t>
                       </a:r>
                     </a:p>
                   </a:txBody>
                   <a:tcPr/>
                 </a:tc>
-              </a:tr>
-              <a:tr h="374072">
                 <a:tc>
                   <a:txBody>
                     <a:bodyPr/>
@@ -4077,22 +4271,7 @@
                         <a:defRPr sz="1200"/>
                       </a:pPr>
                       <a:r>
-                        <a:t>Run 7</a:t>
-                      </a:r>
-                    </a:p>
-                  </a:txBody>
-                  <a:tcPr/>
-                </a:tc>
-                <a:tc>
-                  <a:txBody>
-                    <a:bodyPr/>
-                    <a:lstStyle/>
-                    <a:p>
-                      <a:pPr algn="ctr">
-                        <a:defRPr sz="1200"/>
-                      </a:pPr>
-                      <a:r>
-                        <a:t>20260616</a:t>
+                        <a:t>20260606</a:t>
                       </a:r>
                     </a:p>
                   </a:txBody>
@@ -4150,184 +4329,6 @@
                       </a:pPr>
                       <a:r>
                         <a:t>Happy</a:t>
-                      </a:r>
-                    </a:p>
-                  </a:txBody>
-                  <a:tcPr/>
-                </a:tc>
-              </a:tr>
-              <a:tr h="374072">
-                <a:tc>
-                  <a:txBody>
-                    <a:bodyPr/>
-                    <a:lstStyle/>
-                    <a:p>
-                      <a:pPr algn="ctr">
-                        <a:defRPr sz="1200"/>
-                      </a:pPr>
-                      <a:r>
-                        <a:t>Run 8</a:t>
-                      </a:r>
-                    </a:p>
-                  </a:txBody>
-                  <a:tcPr/>
-                </a:tc>
-                <a:tc>
-                  <a:txBody>
-                    <a:bodyPr/>
-                    <a:lstStyle/>
-                    <a:p>
-                      <a:pPr algn="ctr">
-                        <a:defRPr sz="1200"/>
-                      </a:pPr>
-                      <a:r>
-                        <a:t>20260617</a:t>
-                      </a:r>
-                    </a:p>
-                  </a:txBody>
-                  <a:tcPr/>
-                </a:tc>
-                <a:tc>
-                  <a:txBody>
-                    <a:bodyPr/>
-                    <a:lstStyle/>
-                    <a:p>
-                      <a:pPr algn="ctr">
-                        <a:defRPr sz="1200">
-                          <a:solidFill>
-                            <a:srgbClr val="2E7D32"/>
-                          </a:solidFill>
-                        </a:defRPr>
-                      </a:pPr>
-                      <a:r>
-                        <a:t>Happy</a:t>
-                      </a:r>
-                    </a:p>
-                  </a:txBody>
-                  <a:tcPr/>
-                </a:tc>
-                <a:tc>
-                  <a:txBody>
-                    <a:bodyPr/>
-                    <a:lstStyle/>
-                    <a:p>
-                      <a:pPr algn="ctr">
-                        <a:defRPr sz="1200">
-                          <a:solidFill>
-                            <a:srgbClr val="2E7D32"/>
-                          </a:solidFill>
-                        </a:defRPr>
-                      </a:pPr>
-                      <a:r>
-                        <a:t>Happy</a:t>
-                      </a:r>
-                    </a:p>
-                  </a:txBody>
-                  <a:tcPr/>
-                </a:tc>
-                <a:tc>
-                  <a:txBody>
-                    <a:bodyPr/>
-                    <a:lstStyle/>
-                    <a:p>
-                      <a:pPr algn="ctr">
-                        <a:defRPr sz="1200">
-                          <a:solidFill>
-                            <a:srgbClr val="2E7D32"/>
-                          </a:solidFill>
-                        </a:defRPr>
-                      </a:pPr>
-                      <a:r>
-                        <a:t>Happy</a:t>
-                      </a:r>
-                    </a:p>
-                  </a:txBody>
-                  <a:tcPr/>
-                </a:tc>
-              </a:tr>
-              <a:tr h="374080">
-                <a:tc>
-                  <a:txBody>
-                    <a:bodyPr/>
-                    <a:lstStyle/>
-                    <a:p>
-                      <a:pPr algn="ctr">
-                        <a:defRPr sz="1200"/>
-                      </a:pPr>
-                      <a:r>
-                        <a:t>Run 9</a:t>
-                      </a:r>
-                    </a:p>
-                  </a:txBody>
-                  <a:tcPr/>
-                </a:tc>
-                <a:tc>
-                  <a:txBody>
-                    <a:bodyPr/>
-                    <a:lstStyle/>
-                    <a:p>
-                      <a:pPr algn="ctr">
-                        <a:defRPr sz="1200"/>
-                      </a:pPr>
-                      <a:r>
-                        <a:t>20260618</a:t>
-                      </a:r>
-                    </a:p>
-                  </a:txBody>
-                  <a:tcPr/>
-                </a:tc>
-                <a:tc>
-                  <a:txBody>
-                    <a:bodyPr/>
-                    <a:lstStyle/>
-                    <a:p>
-                      <a:pPr algn="ctr">
-                        <a:defRPr sz="1200" b="1">
-                          <a:solidFill>
-                            <a:srgbClr val="D9383A"/>
-                          </a:solidFill>
-                        </a:defRPr>
-                      </a:pPr>
-                      <a:r>
-                        <a:t>Exception</a:t>
-                      </a:r>
-                    </a:p>
-                  </a:txBody>
-                  <a:tcPr/>
-                </a:tc>
-                <a:tc>
-                  <a:txBody>
-                    <a:bodyPr/>
-                    <a:lstStyle/>
-                    <a:p>
-                      <a:pPr algn="ctr">
-                        <a:defRPr sz="1200">
-                          <a:solidFill>
-                            <a:srgbClr val="2E7D32"/>
-                          </a:solidFill>
-                        </a:defRPr>
-                      </a:pPr>
-                      <a:r>
-                        <a:t>Happy</a:t>
-                      </a:r>
-                    </a:p>
-                  </a:txBody>
-                  <a:tcPr/>
-                </a:tc>
-                <a:tc>
-                  <a:txBody>
-                    <a:bodyPr/>
-                    <a:lstStyle/>
-                    <a:p>
-                      <a:pPr algn="ctr">
-                        <a:defRPr sz="1200" b="1">
-                          <a:solidFill>
-                            <a:srgbClr val="D9383A"/>
-                          </a:solidFill>
-                        </a:defRPr>
-                      </a:pPr>
-                      <a:r>
-                        <a:t>Exception</a:t>
                       </a:r>
                     </a:p>
                   </a:txBody>
@@ -4379,7 +4380,7 @@
               </a:defRPr>
             </a:pPr>
             <a:r>
-              <a:t>Exception Deep-Dive: Run 5 (20260614)</a:t>
+              <a:t>Exception Deep-Dive: Run 24 (20260621)</a:t>
             </a:r>
           </a:p>
         </p:txBody>
@@ -4414,25 +4415,12 @@
             <a:pPr>
               <a:defRPr sz="1600">
                 <a:solidFill>
-                  <a:srgbClr val="2E7D32"/>
-                </a:solidFill>
-              </a:defRPr>
-            </a:pPr>
-            <a:r>
-              <a:t>Report A status: Happy</a:t>
-            </a:r>
-          </a:p>
-          <a:p>
-            <a:br/>
-            <a:pPr>
-              <a:defRPr sz="1600">
-                <a:solidFill>
                   <a:srgbClr val="D9383A"/>
                 </a:solidFill>
               </a:defRPr>
             </a:pPr>
             <a:r>
-              <a:t>Report B status: Exception</a:t>
+              <a:t>Report A status: Exception</a:t>
             </a:r>
           </a:p>
           <a:p>
@@ -4444,7 +4432,31 @@
               </a:defRPr>
             </a:pPr>
             <a:r>
-              <a:t>   - Threshold1: 52 (Limit: 50) → Pass</a:t>
+              <a:t>   - Threshold1: 76 (Limit: 50) → Pass</a:t>
+            </a:r>
+          </a:p>
+          <a:p>
+            <a:pPr>
+              <a:defRPr sz="1400">
+                <a:solidFill>
+                  <a:srgbClr val="666666"/>
+                </a:solidFill>
+              </a:defRPr>
+            </a:pPr>
+            <a:r>
+              <a:t>   - Threshold2: 81 (Limit: 50) → Pass</a:t>
+            </a:r>
+          </a:p>
+          <a:p>
+            <a:pPr>
+              <a:defRPr sz="1400">
+                <a:solidFill>
+                  <a:srgbClr val="666666"/>
+                </a:solidFill>
+              </a:defRPr>
+            </a:pPr>
+            <a:r>
+              <a:t>   - Threshold3: 80 (Limit: 50) → Pass</a:t>
             </a:r>
           </a:p>
           <a:p>
@@ -4456,31 +4468,20 @@
               </a:defRPr>
             </a:pPr>
             <a:r>
-              <a:t>   - Threshold2: 40 (Limit: 50) → BREACHED</a:t>
-            </a:r>
-          </a:p>
-          <a:p>
+              <a:t>   - Threshold4: 13 (Limit: 50) → BREACHED</a:t>
+            </a:r>
+          </a:p>
+          <a:p>
+            <a:br/>
             <a:pPr>
-              <a:defRPr sz="1400">
+              <a:defRPr sz="1600">
                 <a:solidFill>
-                  <a:srgbClr val="666666"/>
+                  <a:srgbClr val="2E7D32"/>
                 </a:solidFill>
               </a:defRPr>
             </a:pPr>
             <a:r>
-              <a:t>   - Threshold3: 78 (Limit: 50) → Pass</a:t>
-            </a:r>
-          </a:p>
-          <a:p>
-            <a:pPr>
-              <a:defRPr sz="1400">
-                <a:solidFill>
-                  <a:srgbClr val="666666"/>
-                </a:solidFill>
-              </a:defRPr>
-            </a:pPr>
-            <a:r>
-              <a:t>   - Threshold4: 69 (Limit: 50) → Pass</a:t>
+              <a:t>Report B status: Happy</a:t>
             </a:r>
           </a:p>
         </p:txBody>
@@ -4526,7 +4527,7 @@
               </a:defRPr>
             </a:pPr>
             <a:r>
-              <a:t>Exception Deep-Dive: Run 9 (20260618)</a:t>
+              <a:t>Exception Deep-Dive: Run 26 (20260623)</a:t>
             </a:r>
           </a:p>
         </p:txBody>
@@ -4561,12 +4562,37 @@
             <a:pPr>
               <a:defRPr sz="1600">
                 <a:solidFill>
+                  <a:srgbClr val="2E7D32"/>
+                </a:solidFill>
+              </a:defRPr>
+            </a:pPr>
+            <a:r>
+              <a:t>Report A status: Happy</a:t>
+            </a:r>
+          </a:p>
+          <a:p>
+            <a:br/>
+            <a:pPr>
+              <a:defRPr sz="1600">
+                <a:solidFill>
                   <a:srgbClr val="D9383A"/>
                 </a:solidFill>
               </a:defRPr>
             </a:pPr>
             <a:r>
-              <a:t>Report A status: Exception</a:t>
+              <a:t>Report B status: Exception</a:t>
+            </a:r>
+          </a:p>
+          <a:p>
+            <a:pPr>
+              <a:defRPr sz="1400">
+                <a:solidFill>
+                  <a:srgbClr val="D9383A"/>
+                </a:solidFill>
+              </a:defRPr>
+            </a:pPr>
+            <a:r>
+              <a:t>   - Threshold1: 21 (Limit: 50) → BREACHED</a:t>
             </a:r>
           </a:p>
           <a:p>
@@ -4578,7 +4604,166 @@
               </a:defRPr>
             </a:pPr>
             <a:r>
-              <a:t>   - Threshold1: 59 (Limit: 50) → Pass</a:t>
+              <a:t>   - Threshold2: 60 (Limit: 50) → Pass</a:t>
+            </a:r>
+          </a:p>
+          <a:p>
+            <a:pPr>
+              <a:defRPr sz="1400">
+                <a:solidFill>
+                  <a:srgbClr val="666666"/>
+                </a:solidFill>
+              </a:defRPr>
+            </a:pPr>
+            <a:r>
+              <a:t>   - Threshold3: 53 (Limit: 50) → Pass</a:t>
+            </a:r>
+          </a:p>
+          <a:p>
+            <a:pPr>
+              <a:defRPr sz="1400">
+                <a:solidFill>
+                  <a:srgbClr val="666666"/>
+                </a:solidFill>
+              </a:defRPr>
+            </a:pPr>
+            <a:r>
+              <a:t>   - Threshold4: 82 (Limit: 50) → Pass</a:t>
+            </a:r>
+          </a:p>
+        </p:txBody>
+      </p:sp>
+    </p:spTree>
+  </p:cSld>
+  <p:clrMapOvr>
+    <a:masterClrMapping/>
+  </p:clrMapOvr>
+</p:sld>
+</file>
+
+<file path=ppt/slides/slide6.xml><?xml version="1.0" encoding="utf-8"?>
+<p:sld xmlns:a="http://schemas.openxmlformats.org/drawingml/2006/main" xmlns:p="http://schemas.openxmlformats.org/presentationml/2006/main" xmlns:r="http://schemas.openxmlformats.org/officeDocument/2006/relationships">
+  <p:cSld>
+    <p:spTree>
+      <p:nvGrpSpPr>
+        <p:cNvPr id="1" name=""/>
+        <p:cNvGrpSpPr/>
+        <p:nvPr/>
+      </p:nvGrpSpPr>
+      <p:grpSpPr/>
+      <p:sp>
+        <p:nvSpPr>
+          <p:cNvPr id="2" name="Title 1"/>
+          <p:cNvSpPr>
+            <a:spLocks noGrp="1"/>
+          </p:cNvSpPr>
+          <p:nvPr>
+            <p:ph type="title"/>
+          </p:nvPr>
+        </p:nvSpPr>
+        <p:spPr/>
+        <p:txBody>
+          <a:bodyPr/>
+          <a:lstStyle/>
+          <a:p>
+            <a:pPr>
+              <a:defRPr sz="2800" b="1">
+                <a:solidFill>
+                  <a:srgbClr val="D9383A"/>
+                </a:solidFill>
+              </a:defRPr>
+            </a:pPr>
+            <a:r>
+              <a:t>Exception Deep-Dive: Run 4 (20260601)</a:t>
+            </a:r>
+          </a:p>
+        </p:txBody>
+      </p:sp>
+      <p:sp>
+        <p:nvSpPr>
+          <p:cNvPr id="3" name="Content Placeholder 2"/>
+          <p:cNvSpPr>
+            <a:spLocks noGrp="1"/>
+          </p:cNvSpPr>
+          <p:nvPr>
+            <p:ph idx="1"/>
+          </p:nvPr>
+        </p:nvSpPr>
+        <p:spPr/>
+        <p:txBody>
+          <a:bodyPr/>
+          <a:lstStyle/>
+          <a:p>
+            <a:pPr>
+              <a:defRPr sz="1800" b="1">
+                <a:solidFill>
+                  <a:srgbClr val="00335B"/>
+                </a:solidFill>
+              </a:defRPr>
+            </a:pPr>
+            <a:r>
+              <a:t>Escalation triggered due to threshold breaches:</a:t>
+            </a:r>
+          </a:p>
+          <a:p>
+            <a:pPr>
+              <a:defRPr sz="1600">
+                <a:solidFill>
+                  <a:srgbClr val="2E7D32"/>
+                </a:solidFill>
+              </a:defRPr>
+            </a:pPr>
+            <a:r>
+              <a:t>Report A status: Happy</a:t>
+            </a:r>
+          </a:p>
+          <a:p>
+            <a:br/>
+            <a:pPr>
+              <a:defRPr sz="1600">
+                <a:solidFill>
+                  <a:srgbClr val="D9383A"/>
+                </a:solidFill>
+              </a:defRPr>
+            </a:pPr>
+            <a:r>
+              <a:t>Report B status: Exception</a:t>
+            </a:r>
+          </a:p>
+          <a:p>
+            <a:pPr>
+              <a:defRPr sz="1400">
+                <a:solidFill>
+                  <a:srgbClr val="666666"/>
+                </a:solidFill>
+              </a:defRPr>
+            </a:pPr>
+            <a:r>
+              <a:t>   - Threshold1: 72 (Limit: 50) → Pass</a:t>
+            </a:r>
+          </a:p>
+          <a:p>
+            <a:pPr>
+              <a:defRPr sz="1400">
+                <a:solidFill>
+                  <a:srgbClr val="666666"/>
+                </a:solidFill>
+              </a:defRPr>
+            </a:pPr>
+            <a:r>
+              <a:t>   - Threshold2: 88 (Limit: 50) → Pass</a:t>
+            </a:r>
+          </a:p>
+          <a:p>
+            <a:pPr>
+              <a:defRPr sz="1400">
+                <a:solidFill>
+                  <a:srgbClr val="666666"/>
+                </a:solidFill>
+              </a:defRPr>
+            </a:pPr>
+            <a:r>
+              <a:t>   - Threshold3: 66 (Limit: 50) → Pass</a:t>
             </a:r>
           </a:p>
           <a:p>
@@ -4590,44 +4775,7 @@
               </a:defRPr>
             </a:pPr>
             <a:r>
-              <a:t>   - Threshold2: 34 (Limit: 50) → BREACHED</a:t>
-            </a:r>
-          </a:p>
-          <a:p>
-            <a:pPr>
-              <a:defRPr sz="1400">
-                <a:solidFill>
-                  <a:srgbClr val="666666"/>
-                </a:solidFill>
-              </a:defRPr>
-            </a:pPr>
-            <a:r>
-              <a:t>   - Threshold3: 73 (Limit: 50) → Pass</a:t>
-            </a:r>
-          </a:p>
-          <a:p>
-            <a:pPr>
-              <a:defRPr sz="1400">
-                <a:solidFill>
-                  <a:srgbClr val="666666"/>
-                </a:solidFill>
-              </a:defRPr>
-            </a:pPr>
-            <a:r>
-              <a:t>   - Threshold4: 81 (Limit: 50) → Pass</a:t>
-            </a:r>
-          </a:p>
-          <a:p>
-            <a:br/>
-            <a:pPr>
-              <a:defRPr sz="1600">
-                <a:solidFill>
-                  <a:srgbClr val="2E7D32"/>
-                </a:solidFill>
-              </a:defRPr>
-            </a:pPr>
-            <a:r>
-              <a:t>Report B status: Happy</a:t>
+              <a:t>   - Threshold4: 44 (Limit: 50) → BREACHED</a:t>
             </a:r>
           </a:p>
         </p:txBody>

--- a/presentations/Automated Presentations/ISAAI-Runs-Summary-Deck.pptx
+++ b/presentations/Automated Presentations/ISAAI-Runs-Summary-Deck.pptx
@@ -3135,7 +3135,7 @@
           </a:p>
           <a:p>
             <a:r>
-              <a:t>Generated on 2026-06-28 23:19:03</a:t>
+              <a:t>Generated on 2026-06-28 23:39:54</a:t>
             </a:r>
           </a:p>
         </p:txBody>
